--- a/docs/slides/Modulo 4/dia1_anexo.pptx
+++ b/docs/slides/Modulo 4/dia1_anexo.pptx
@@ -316,7 +316,7 @@
           <a:p>
             <a:fld id="{5BCAD085-E8A6-8845-BD4E-CB4CCA059FC4}" type="datetimeFigureOut">
               <a:rPr lang="en-US" smtClean="0"/>
-              <a:t>4/13/2026</a:t>
+              <a:t>4/23/2026</a:t>
             </a:fld>
             <a:endParaRPr lang="en-US"/>
           </a:p>
@@ -484,7 +484,7 @@
           <a:p>
             <a:fld id="{5BCAD085-E8A6-8845-BD4E-CB4CCA059FC4}" type="datetimeFigureOut">
               <a:rPr lang="en-US" smtClean="0"/>
-              <a:t>4/13/2026</a:t>
+              <a:t>4/23/2026</a:t>
             </a:fld>
             <a:endParaRPr lang="en-US"/>
           </a:p>
@@ -662,7 +662,7 @@
           <a:p>
             <a:fld id="{5BCAD085-E8A6-8845-BD4E-CB4CCA059FC4}" type="datetimeFigureOut">
               <a:rPr lang="en-US" smtClean="0"/>
-              <a:t>4/13/2026</a:t>
+              <a:t>4/23/2026</a:t>
             </a:fld>
             <a:endParaRPr lang="en-US"/>
           </a:p>
@@ -830,7 +830,7 @@
           <a:p>
             <a:fld id="{5BCAD085-E8A6-8845-BD4E-CB4CCA059FC4}" type="datetimeFigureOut">
               <a:rPr lang="en-US" smtClean="0"/>
-              <a:t>4/13/2026</a:t>
+              <a:t>4/23/2026</a:t>
             </a:fld>
             <a:endParaRPr lang="en-US"/>
           </a:p>
@@ -1075,7 +1075,7 @@
           <a:p>
             <a:fld id="{5BCAD085-E8A6-8845-BD4E-CB4CCA059FC4}" type="datetimeFigureOut">
               <a:rPr lang="en-US" smtClean="0"/>
-              <a:t>4/13/2026</a:t>
+              <a:t>4/23/2026</a:t>
             </a:fld>
             <a:endParaRPr lang="en-US"/>
           </a:p>
@@ -1360,7 +1360,7 @@
           <a:p>
             <a:fld id="{5BCAD085-E8A6-8845-BD4E-CB4CCA059FC4}" type="datetimeFigureOut">
               <a:rPr lang="en-US" smtClean="0"/>
-              <a:t>4/13/2026</a:t>
+              <a:t>4/23/2026</a:t>
             </a:fld>
             <a:endParaRPr lang="en-US"/>
           </a:p>
@@ -1779,7 +1779,7 @@
           <a:p>
             <a:fld id="{5BCAD085-E8A6-8845-BD4E-CB4CCA059FC4}" type="datetimeFigureOut">
               <a:rPr lang="en-US" smtClean="0"/>
-              <a:t>4/13/2026</a:t>
+              <a:t>4/23/2026</a:t>
             </a:fld>
             <a:endParaRPr lang="en-US"/>
           </a:p>
@@ -1896,7 +1896,7 @@
           <a:p>
             <a:fld id="{5BCAD085-E8A6-8845-BD4E-CB4CCA059FC4}" type="datetimeFigureOut">
               <a:rPr lang="en-US" smtClean="0"/>
-              <a:t>4/13/2026</a:t>
+              <a:t>4/23/2026</a:t>
             </a:fld>
             <a:endParaRPr lang="en-US"/>
           </a:p>
@@ -1991,7 +1991,7 @@
           <a:p>
             <a:fld id="{5BCAD085-E8A6-8845-BD4E-CB4CCA059FC4}" type="datetimeFigureOut">
               <a:rPr lang="en-US" smtClean="0"/>
-              <a:t>4/13/2026</a:t>
+              <a:t>4/23/2026</a:t>
             </a:fld>
             <a:endParaRPr lang="en-US"/>
           </a:p>
@@ -2266,7 +2266,7 @@
           <a:p>
             <a:fld id="{5BCAD085-E8A6-8845-BD4E-CB4CCA059FC4}" type="datetimeFigureOut">
               <a:rPr lang="en-US" smtClean="0"/>
-              <a:t>4/13/2026</a:t>
+              <a:t>4/23/2026</a:t>
             </a:fld>
             <a:endParaRPr lang="en-US"/>
           </a:p>
@@ -2518,7 +2518,7 @@
           <a:p>
             <a:fld id="{5BCAD085-E8A6-8845-BD4E-CB4CCA059FC4}" type="datetimeFigureOut">
               <a:rPr lang="en-US" smtClean="0"/>
-              <a:t>4/13/2026</a:t>
+              <a:t>4/23/2026</a:t>
             </a:fld>
             <a:endParaRPr lang="en-US"/>
           </a:p>
@@ -2729,7 +2729,7 @@
           <a:p>
             <a:fld id="{5BCAD085-E8A6-8845-BD4E-CB4CCA059FC4}" type="datetimeFigureOut">
               <a:rPr lang="en-US" smtClean="0"/>
-              <a:t>4/13/2026</a:t>
+              <a:t>4/23/2026</a:t>
             </a:fld>
             <a:endParaRPr lang="en-US"/>
           </a:p>
@@ -7606,196 +7606,36 @@
           </a:p>
         </p:txBody>
       </p:sp>
-      <p:sp>
-        <p:nvSpPr>
-          <p:cNvPr id="5" name="Rectangle 4"/>
-          <p:cNvSpPr/>
+      <p:pic>
+        <p:nvPicPr>
+          <p:cNvPr id="11" name="Imagen 10">
+            <a:extLst>
+              <a:ext uri="{FF2B5EF4-FFF2-40B4-BE49-F238E27FC236}">
+                <a16:creationId xmlns:a16="http://schemas.microsoft.com/office/drawing/2014/main" id="{D59DBE3F-BD59-64A7-9EA0-2D41F516CB19}"/>
+              </a:ext>
+            </a:extLst>
+          </p:cNvPr>
+          <p:cNvPicPr>
+            <a:picLocks noChangeAspect="1"/>
+          </p:cNvPicPr>
           <p:nvPr/>
-        </p:nvSpPr>
+        </p:nvPicPr>
+        <p:blipFill>
+          <a:blip r:embed="rId2"/>
+          <a:stretch>
+            <a:fillRect/>
+          </a:stretch>
+        </p:blipFill>
         <p:spPr>
           <a:xfrm>
-            <a:off x="1371600" y="1371600"/>
-            <a:ext cx="9418320" cy="4114800"/>
+            <a:off x="1961090" y="1360448"/>
+            <a:ext cx="8266644" cy="5497552"/>
           </a:xfrm>
           <a:prstGeom prst="rect">
             <a:avLst/>
           </a:prstGeom>
-          <a:solidFill>
-            <a:srgbClr val="F2F2F2"/>
-          </a:solidFill>
-          <a:ln>
-            <a:noFill/>
-          </a:ln>
         </p:spPr>
-        <p:style>
-          <a:lnRef idx="1">
-            <a:schemeClr val="accent1"/>
-          </a:lnRef>
-          <a:fillRef idx="3">
-            <a:schemeClr val="accent1"/>
-          </a:fillRef>
-          <a:effectRef idx="2">
-            <a:schemeClr val="accent1"/>
-          </a:effectRef>
-          <a:fontRef idx="minor">
-            <a:schemeClr val="lt1"/>
-          </a:fontRef>
-        </p:style>
-        <p:txBody>
-          <a:bodyPr rtlCol="0" anchor="ctr"/>
-          <a:lstStyle/>
-          <a:p>
-            <a:pPr algn="ctr"/>
-            <a:endParaRPr/>
-          </a:p>
-        </p:txBody>
-      </p:sp>
-      <p:sp>
-        <p:nvSpPr>
-          <p:cNvPr id="6" name="TextBox 5"/>
-          <p:cNvSpPr txBox="1"/>
-          <p:nvPr/>
-        </p:nvSpPr>
-        <p:spPr>
-          <a:xfrm>
-            <a:off x="1828800" y="2286000"/>
-            <a:ext cx="8503920" cy="1371600"/>
-          </a:xfrm>
-          <a:prstGeom prst="rect">
-            <a:avLst/>
-          </a:prstGeom>
-          <a:noFill/>
-        </p:spPr>
-        <p:txBody>
-          <a:bodyPr wrap="square"/>
-          <a:lstStyle/>
-          <a:p>
-            <a:pPr algn="ctr">
-              <a:defRPr sz="2400" b="0">
-                <a:solidFill>
-                  <a:srgbClr val="999999"/>
-                </a:solidFill>
-                <a:latin typeface="Calibri"/>
-              </a:defRPr>
-            </a:pPr>
-            <a:r>
-              <a:t>[Diagrama: App cliente -&gt; Gateway -&gt; Peer (chaincode token) -&gt; World State (balances)]</a:t>
-            </a:r>
-          </a:p>
-        </p:txBody>
-      </p:sp>
-      <p:sp>
-        <p:nvSpPr>
-          <p:cNvPr id="7" name="Rectangle 6"/>
-          <p:cNvSpPr/>
-          <p:nvPr/>
-        </p:nvSpPr>
-        <p:spPr>
-          <a:xfrm>
-            <a:off x="1371600" y="3840480"/>
-            <a:ext cx="9418320" cy="320040"/>
-          </a:xfrm>
-          <a:prstGeom prst="rect">
-            <a:avLst/>
-          </a:prstGeom>
-          <a:solidFill>
-            <a:srgbClr val="7C3AED"/>
-          </a:solidFill>
-          <a:ln>
-            <a:noFill/>
-          </a:ln>
-        </p:spPr>
-        <p:style>
-          <a:lnRef idx="1">
-            <a:schemeClr val="accent1"/>
-          </a:lnRef>
-          <a:fillRef idx="3">
-            <a:schemeClr val="accent1"/>
-          </a:fillRef>
-          <a:effectRef idx="2">
-            <a:schemeClr val="accent1"/>
-          </a:effectRef>
-          <a:fontRef idx="minor">
-            <a:schemeClr val="lt1"/>
-          </a:fontRef>
-        </p:style>
-        <p:txBody>
-          <a:bodyPr rtlCol="0" anchor="ctr"/>
-          <a:lstStyle/>
-          <a:p>
-            <a:pPr algn="ctr"/>
-            <a:endParaRPr/>
-          </a:p>
-        </p:txBody>
-      </p:sp>
-      <p:sp>
-        <p:nvSpPr>
-          <p:cNvPr id="8" name="TextBox 7"/>
-          <p:cNvSpPr txBox="1"/>
-          <p:nvPr/>
-        </p:nvSpPr>
-        <p:spPr>
-          <a:xfrm>
-            <a:off x="1371600" y="3840480"/>
-            <a:ext cx="9418320" cy="320040"/>
-          </a:xfrm>
-          <a:prstGeom prst="rect">
-            <a:avLst/>
-          </a:prstGeom>
-          <a:noFill/>
-        </p:spPr>
-        <p:txBody>
-          <a:bodyPr wrap="square"/>
-          <a:lstStyle/>
-          <a:p>
-            <a:pPr algn="ctr">
-              <a:defRPr sz="1300" b="1">
-                <a:solidFill>
-                  <a:srgbClr val="FFFFFF"/>
-                </a:solidFill>
-                <a:latin typeface="Calibri"/>
-              </a:defRPr>
-            </a:pPr>
-            <a:r>
-              <a:t>Prompt para IA generativa:</a:t>
-            </a:r>
-          </a:p>
-        </p:txBody>
-      </p:sp>
-      <p:sp>
-        <p:nvSpPr>
-          <p:cNvPr id="9" name="TextBox 8"/>
-          <p:cNvSpPr txBox="1"/>
-          <p:nvPr/>
-        </p:nvSpPr>
-        <p:spPr>
-          <a:xfrm>
-            <a:off x="1645920" y="4297680"/>
-            <a:ext cx="8869680" cy="914400"/>
-          </a:xfrm>
-          <a:prstGeom prst="rect">
-            <a:avLst/>
-          </a:prstGeom>
-          <a:noFill/>
-        </p:spPr>
-        <p:txBody>
-          <a:bodyPr wrap="square"/>
-          <a:lstStyle/>
-          <a:p>
-            <a:pPr algn="l">
-              <a:defRPr sz="1400" b="0">
-                <a:solidFill>
-                  <a:srgbClr val="7C3AED"/>
-                </a:solidFill>
-                <a:latin typeface="Consolas"/>
-              </a:defRPr>
-            </a:pPr>
-            <a:r>
-              <a:t>Technical diagram showing token flow in Hyperledger Fabric: client app sends transaction proposal through Fabric Gateway to endorsing peer, chaincode executes token logic, world state updates balances. Clean flat design, dark teal color scheme, labeled arrows between components.</a:t>
-            </a:r>
-          </a:p>
-        </p:txBody>
-      </p:sp>
+      </p:pic>
     </p:spTree>
   </p:cSld>
   <p:clrMapOvr>
@@ -8894,196 +8734,36 @@
           </a:p>
         </p:txBody>
       </p:sp>
-      <p:sp>
-        <p:nvSpPr>
-          <p:cNvPr id="5" name="Rectangle 4"/>
-          <p:cNvSpPr/>
+      <p:pic>
+        <p:nvPicPr>
+          <p:cNvPr id="11" name="Imagen 10">
+            <a:extLst>
+              <a:ext uri="{FF2B5EF4-FFF2-40B4-BE49-F238E27FC236}">
+                <a16:creationId xmlns:a16="http://schemas.microsoft.com/office/drawing/2014/main" id="{7B63A9F1-61A6-9182-E61C-E8A166EF9EF6}"/>
+              </a:ext>
+            </a:extLst>
+          </p:cNvPr>
+          <p:cNvPicPr>
+            <a:picLocks noChangeAspect="1"/>
+          </p:cNvPicPr>
           <p:nvPr/>
-        </p:nvSpPr>
+        </p:nvPicPr>
+        <p:blipFill>
+          <a:blip r:embed="rId2"/>
+          <a:stretch>
+            <a:fillRect/>
+          </a:stretch>
+        </p:blipFill>
         <p:spPr>
           <a:xfrm>
-            <a:off x="1371600" y="1371600"/>
-            <a:ext cx="9418320" cy="4114800"/>
+            <a:off x="2676834" y="1626268"/>
+            <a:ext cx="6835156" cy="4542166"/>
           </a:xfrm>
           <a:prstGeom prst="rect">
             <a:avLst/>
           </a:prstGeom>
-          <a:solidFill>
-            <a:srgbClr val="F2F2F2"/>
-          </a:solidFill>
-          <a:ln>
-            <a:noFill/>
-          </a:ln>
         </p:spPr>
-        <p:style>
-          <a:lnRef idx="1">
-            <a:schemeClr val="accent1"/>
-          </a:lnRef>
-          <a:fillRef idx="3">
-            <a:schemeClr val="accent1"/>
-          </a:fillRef>
-          <a:effectRef idx="2">
-            <a:schemeClr val="accent1"/>
-          </a:effectRef>
-          <a:fontRef idx="minor">
-            <a:schemeClr val="lt1"/>
-          </a:fontRef>
-        </p:style>
-        <p:txBody>
-          <a:bodyPr rtlCol="0" anchor="ctr"/>
-          <a:lstStyle/>
-          <a:p>
-            <a:pPr algn="ctr"/>
-            <a:endParaRPr/>
-          </a:p>
-        </p:txBody>
-      </p:sp>
-      <p:sp>
-        <p:nvSpPr>
-          <p:cNvPr id="6" name="TextBox 5"/>
-          <p:cNvSpPr txBox="1"/>
-          <p:nvPr/>
-        </p:nvSpPr>
-        <p:spPr>
-          <a:xfrm>
-            <a:off x="1828800" y="2286000"/>
-            <a:ext cx="8503920" cy="1371600"/>
-          </a:xfrm>
-          <a:prstGeom prst="rect">
-            <a:avLst/>
-          </a:prstGeom>
-          <a:noFill/>
-        </p:spPr>
-        <p:txBody>
-          <a:bodyPr wrap="square"/>
-          <a:lstStyle/>
-          <a:p>
-            <a:pPr algn="ctr">
-              <a:defRPr sz="2400" b="0">
-                <a:solidFill>
-                  <a:srgbClr val="999999"/>
-                </a:solidFill>
-                <a:latin typeface="Calibri"/>
-              </a:defRPr>
-            </a:pPr>
-            <a:r>
-              <a:t>[Diagrama: Token de 100 se destruye, se crean token de 30 y token de 70]</a:t>
-            </a:r>
-          </a:p>
-        </p:txBody>
-      </p:sp>
-      <p:sp>
-        <p:nvSpPr>
-          <p:cNvPr id="7" name="Rectangle 6"/>
-          <p:cNvSpPr/>
-          <p:nvPr/>
-        </p:nvSpPr>
-        <p:spPr>
-          <a:xfrm>
-            <a:off x="1371600" y="3840480"/>
-            <a:ext cx="9418320" cy="320040"/>
-          </a:xfrm>
-          <a:prstGeom prst="rect">
-            <a:avLst/>
-          </a:prstGeom>
-          <a:solidFill>
-            <a:srgbClr val="7C3AED"/>
-          </a:solidFill>
-          <a:ln>
-            <a:noFill/>
-          </a:ln>
-        </p:spPr>
-        <p:style>
-          <a:lnRef idx="1">
-            <a:schemeClr val="accent1"/>
-          </a:lnRef>
-          <a:fillRef idx="3">
-            <a:schemeClr val="accent1"/>
-          </a:fillRef>
-          <a:effectRef idx="2">
-            <a:schemeClr val="accent1"/>
-          </a:effectRef>
-          <a:fontRef idx="minor">
-            <a:schemeClr val="lt1"/>
-          </a:fontRef>
-        </p:style>
-        <p:txBody>
-          <a:bodyPr rtlCol="0" anchor="ctr"/>
-          <a:lstStyle/>
-          <a:p>
-            <a:pPr algn="ctr"/>
-            <a:endParaRPr/>
-          </a:p>
-        </p:txBody>
-      </p:sp>
-      <p:sp>
-        <p:nvSpPr>
-          <p:cNvPr id="8" name="TextBox 7"/>
-          <p:cNvSpPr txBox="1"/>
-          <p:nvPr/>
-        </p:nvSpPr>
-        <p:spPr>
-          <a:xfrm>
-            <a:off x="1371600" y="3840480"/>
-            <a:ext cx="9418320" cy="320040"/>
-          </a:xfrm>
-          <a:prstGeom prst="rect">
-            <a:avLst/>
-          </a:prstGeom>
-          <a:noFill/>
-        </p:spPr>
-        <p:txBody>
-          <a:bodyPr wrap="square"/>
-          <a:lstStyle/>
-          <a:p>
-            <a:pPr algn="ctr">
-              <a:defRPr sz="1300" b="1">
-                <a:solidFill>
-                  <a:srgbClr val="FFFFFF"/>
-                </a:solidFill>
-                <a:latin typeface="Calibri"/>
-              </a:defRPr>
-            </a:pPr>
-            <a:r>
-              <a:t>Prompt para IA generativa:</a:t>
-            </a:r>
-          </a:p>
-        </p:txBody>
-      </p:sp>
-      <p:sp>
-        <p:nvSpPr>
-          <p:cNvPr id="9" name="TextBox 8"/>
-          <p:cNvSpPr txBox="1"/>
-          <p:nvPr/>
-        </p:nvSpPr>
-        <p:spPr>
-          <a:xfrm>
-            <a:off x="1645920" y="4297680"/>
-            <a:ext cx="8869680" cy="914400"/>
-          </a:xfrm>
-          <a:prstGeom prst="rect">
-            <a:avLst/>
-          </a:prstGeom>
-          <a:noFill/>
-        </p:spPr>
-        <p:txBody>
-          <a:bodyPr wrap="square"/>
-          <a:lstStyle/>
-          <a:p>
-            <a:pPr algn="l">
-              <a:defRPr sz="1400" b="0">
-                <a:solidFill>
-                  <a:srgbClr val="7C3AED"/>
-                </a:solidFill>
-                <a:latin typeface="Consolas"/>
-              </a:defRPr>
-            </a:pPr>
-            <a:r>
-              <a:t>Clean infographic showing UTXO model: a single token worth 100 units splits into two tokens (30 and 70). Left side shows input token being consumed, right side shows two new output tokens created. Arrows indicate flow. Minimalist flat design, teal and white color scheme.</a:t>
-            </a:r>
-          </a:p>
-        </p:txBody>
-      </p:sp>
+      </p:pic>
     </p:spTree>
   </p:cSld>
   <p:clrMapOvr>

--- a/docs/slides/Modulo 4/dia1_anexo.pptx
+++ b/docs/slides/Modulo 4/dia1_anexo.pptx
@@ -19,7 +19,11 @@
     <p:sldId id="267" r:id="rId13"/>
     <p:sldId id="268" r:id="rId14"/>
     <p:sldId id="269" r:id="rId15"/>
-    <p:sldId id="270" r:id="rId16"/>
+    <p:sldId id="271" r:id="rId16"/>
+    <p:sldId id="272" r:id="rId17"/>
+    <p:sldId id="270" r:id="rId18"/>
+    <p:sldId id="273" r:id="rId19"/>
+    <p:sldId id="274" r:id="rId20"/>
   </p:sldIdLst>
   <p:sldSz cx="12188825" cy="6858000"/>
   <p:notesSz cx="6858000" cy="9144000"/>
@@ -5744,6 +5748,874 @@
         <p:spPr>
           <a:xfrm>
             <a:off x="0" y="0"/>
+            <a:ext cx="12188952" cy="73152"/>
+          </a:xfrm>
+          <a:prstGeom prst="rect">
+            <a:avLst/>
+          </a:prstGeom>
+          <a:solidFill>
+            <a:srgbClr val="22627E"/>
+          </a:solidFill>
+          <a:ln>
+            <a:noFill/>
+          </a:ln>
+        </p:spPr>
+        <p:style>
+          <a:lnRef idx="1">
+            <a:schemeClr val="accent1"/>
+          </a:lnRef>
+          <a:fillRef idx="3">
+            <a:schemeClr val="accent1"/>
+          </a:fillRef>
+          <a:effectRef idx="2">
+            <a:schemeClr val="accent1"/>
+          </a:effectRef>
+          <a:fontRef idx="minor">
+            <a:schemeClr val="lt1"/>
+          </a:fontRef>
+        </p:style>
+        <p:txBody>
+          <a:bodyPr rtlCol="0" anchor="ctr"/>
+          <a:lstStyle/>
+          <a:p>
+            <a:pPr algn="ctr"/>
+            <a:endParaRPr/>
+          </a:p>
+        </p:txBody>
+      </p:sp>
+      <p:sp>
+        <p:nvSpPr>
+          <p:cNvPr id="3" name="TextBox 2"/>
+          <p:cNvSpPr txBox="1"/>
+          <p:nvPr/>
+        </p:nvSpPr>
+        <p:spPr>
+          <a:xfrm>
+            <a:off x="457200" y="274320"/>
+            <a:ext cx="10972800" cy="731520"/>
+          </a:xfrm>
+          <a:prstGeom prst="rect">
+            <a:avLst/>
+          </a:prstGeom>
+          <a:noFill/>
+        </p:spPr>
+        <p:txBody>
+          <a:bodyPr wrap="square"/>
+          <a:lstStyle/>
+          <a:p>
+            <a:pPr algn="l">
+              <a:defRPr sz="3200" b="1">
+                <a:solidFill>
+                  <a:srgbClr val="22627E"/>
+                </a:solidFill>
+                <a:latin typeface="Calibri"/>
+              </a:defRPr>
+            </a:pPr>
+            <a:r>
+              <a:t>Respuestas al debate (1/2)</a:t>
+            </a:r>
+          </a:p>
+        </p:txBody>
+      </p:sp>
+      <p:sp>
+        <p:nvSpPr>
+          <p:cNvPr id="4" name="Rectangle 3"/>
+          <p:cNvSpPr/>
+          <p:nvPr/>
+        </p:nvSpPr>
+        <p:spPr>
+          <a:xfrm>
+            <a:off x="457200" y="1051560"/>
+            <a:ext cx="10972800" cy="27432"/>
+          </a:xfrm>
+          <a:prstGeom prst="rect">
+            <a:avLst/>
+          </a:prstGeom>
+          <a:solidFill>
+            <a:srgbClr val="22627E"/>
+          </a:solidFill>
+          <a:ln>
+            <a:noFill/>
+          </a:ln>
+        </p:spPr>
+        <p:style>
+          <a:lnRef idx="1">
+            <a:schemeClr val="accent1"/>
+          </a:lnRef>
+          <a:fillRef idx="3">
+            <a:schemeClr val="accent1"/>
+          </a:fillRef>
+          <a:effectRef idx="2">
+            <a:schemeClr val="accent1"/>
+          </a:effectRef>
+          <a:fontRef idx="minor">
+            <a:schemeClr val="lt1"/>
+          </a:fontRef>
+        </p:style>
+        <p:txBody>
+          <a:bodyPr rtlCol="0" anchor="ctr"/>
+          <a:lstStyle/>
+          <a:p>
+            <a:pPr algn="ctr"/>
+            <a:endParaRPr/>
+          </a:p>
+        </p:txBody>
+      </p:sp>
+      <p:sp>
+        <p:nvSpPr>
+          <p:cNvPr id="5" name="TextBox 4"/>
+          <p:cNvSpPr txBox="1"/>
+          <p:nvPr/>
+        </p:nvSpPr>
+        <p:spPr>
+          <a:xfrm>
+            <a:off x="640080" y="1280160"/>
+            <a:ext cx="10515600" cy="5029200"/>
+          </a:xfrm>
+          <a:prstGeom prst="rect">
+            <a:avLst/>
+          </a:prstGeom>
+          <a:noFill/>
+        </p:spPr>
+        <p:txBody>
+          <a:bodyPr wrap="square">
+            <a:spAutoFit/>
+          </a:bodyPr>
+          <a:lstStyle/>
+          <a:p>
+            <a:pPr>
+              <a:spcAft>
+                <a:spcPts val="800"/>
+              </a:spcAft>
+              <a:defRPr sz="2000">
+                <a:solidFill>
+                  <a:srgbClr val="333333"/>
+                </a:solidFill>
+                <a:latin typeface="Calibri"/>
+              </a:defRPr>
+            </a:pPr>
+            <a:r>
+              <a:t>1. Permisionado vs libre creacion: ¿ventaja o limitacion?</a:t>
+            </a:r>
+          </a:p>
+          <a:p>
+            <a:pPr lvl="1">
+              <a:spcAft>
+                <a:spcPts val="400"/>
+              </a:spcAft>
+              <a:defRPr sz="1700">
+                <a:solidFill>
+                  <a:srgbClr val="666666"/>
+                </a:solidFill>
+                <a:latin typeface="Calibri"/>
+              </a:defRPr>
+            </a:pPr>
+            <a:r>
+              <a:t>    Depende del caso: en un consorcio empresarial es VENTAJA (evita spam y estafas).</a:t>
+            </a:r>
+          </a:p>
+          <a:p>
+            <a:pPr lvl="1">
+              <a:spcAft>
+                <a:spcPts val="400"/>
+              </a:spcAft>
+              <a:defRPr sz="1700">
+                <a:solidFill>
+                  <a:srgbClr val="666666"/>
+                </a:solidFill>
+                <a:latin typeface="Calibri"/>
+              </a:defRPr>
+            </a:pPr>
+            <a:r>
+              <a:t>    En un ecosistema abierto y con innovacion rapida es LIMITACION (frena la creatividad).</a:t>
+            </a:r>
+          </a:p>
+          <a:p>
+            <a:pPr lvl="1">
+              <a:spcAft>
+                <a:spcPts val="400"/>
+              </a:spcAft>
+              <a:defRPr sz="1700">
+                <a:solidFill>
+                  <a:srgbClr val="666666"/>
+                </a:solidFill>
+                <a:latin typeface="Calibri"/>
+              </a:defRPr>
+            </a:pPr>
+            <a:r>
+              <a:t>    Fabric esta pensado para entornos regulados donde se exige control y responsabilidad.</a:t>
+            </a:r>
+          </a:p>
+          <a:p>
+            <a:pPr lvl="1">
+              <a:spcAft>
+                <a:spcPts val="400"/>
+              </a:spcAft>
+              <a:defRPr sz="1700">
+                <a:solidFill>
+                  <a:srgbClr val="666666"/>
+                </a:solidFill>
+                <a:latin typeface="Calibri"/>
+              </a:defRPr>
+            </a:pPr>
+            <a:r>
+              <a:t>    El 99% de ICO fraudulentas de 2017-2018 no podrian haber ocurrido en Fabric.</a:t>
+            </a:r>
+          </a:p>
+          <a:p>
+            <a:pPr>
+              <a:spcAft>
+                <a:spcPts val="800"/>
+              </a:spcAft>
+              <a:defRPr sz="2000">
+                <a:solidFill>
+                  <a:srgbClr val="333333"/>
+                </a:solidFill>
+                <a:latin typeface="Calibri"/>
+              </a:defRPr>
+            </a:pPr>
+            <a:r>
+              <a:t>2. Activos que se benefician de tokenizacion permissioned:</a:t>
+            </a:r>
+          </a:p>
+          <a:p>
+            <a:pPr lvl="1">
+              <a:spcAft>
+                <a:spcPts val="400"/>
+              </a:spcAft>
+              <a:defRPr sz="1700">
+                <a:solidFill>
+                  <a:srgbClr val="666666"/>
+                </a:solidFill>
+                <a:latin typeface="Calibri"/>
+              </a:defRPr>
+            </a:pPr>
+            <a:r>
+              <a:t>    Titulos de propiedad inmobiliaria (registros oficiales con multiples partes).</a:t>
+            </a:r>
+          </a:p>
+          <a:p>
+            <a:pPr lvl="1">
+              <a:spcAft>
+                <a:spcPts val="400"/>
+              </a:spcAft>
+              <a:defRPr sz="1700">
+                <a:solidFill>
+                  <a:srgbClr val="666666"/>
+                </a:solidFill>
+                <a:latin typeface="Calibri"/>
+              </a:defRPr>
+            </a:pPr>
+            <a:r>
+              <a:t>    Bonos y valores tokenizados entre bancos.</a:t>
+            </a:r>
+          </a:p>
+          <a:p>
+            <a:pPr lvl="1">
+              <a:spcAft>
+                <a:spcPts val="400"/>
+              </a:spcAft>
+              <a:defRPr sz="1700">
+                <a:solidFill>
+                  <a:srgbClr val="666666"/>
+                </a:solidFill>
+                <a:latin typeface="Calibri"/>
+              </a:defRPr>
+            </a:pPr>
+            <a:r>
+              <a:t>    Certificados de origen (vinos, diamantes, commodities).</a:t>
+            </a:r>
+          </a:p>
+          <a:p>
+            <a:pPr lvl="1">
+              <a:spcAft>
+                <a:spcPts val="400"/>
+              </a:spcAft>
+              <a:defRPr sz="1700">
+                <a:solidFill>
+                  <a:srgbClr val="666666"/>
+                </a:solidFill>
+                <a:latin typeface="Calibri"/>
+              </a:defRPr>
+            </a:pPr>
+            <a:r>
+              <a:t>    Puntos de fidelizacion entre empresas del mismo consorcio.</a:t>
+            </a:r>
+          </a:p>
+          <a:p>
+            <a:pPr lvl="1">
+              <a:spcAft>
+                <a:spcPts val="400"/>
+              </a:spcAft>
+              <a:defRPr sz="1700">
+                <a:solidFill>
+                  <a:srgbClr val="666666"/>
+                </a:solidFill>
+                <a:latin typeface="Calibri"/>
+              </a:defRPr>
+            </a:pPr>
+            <a:r>
+              <a:t>    Creditos de carbono con auditoria regulatoria.</a:t>
+            </a:r>
+          </a:p>
+          <a:p>
+            <a:pPr lvl="1">
+              <a:spcAft>
+                <a:spcPts val="400"/>
+              </a:spcAft>
+              <a:defRPr sz="1700">
+                <a:solidFill>
+                  <a:srgbClr val="666666"/>
+                </a:solidFill>
+                <a:latin typeface="Calibri"/>
+              </a:defRPr>
+            </a:pPr>
+            <a:r>
+              <a:t>    Cualquier activo con valor y necesidad de trazabilidad y auditoria.</a:t>
+            </a:r>
+          </a:p>
+          <a:p>
+            <a:pPr>
+              <a:spcAft>
+                <a:spcPts val="800"/>
+              </a:spcAft>
+              <a:defRPr sz="2000">
+                <a:solidFill>
+                  <a:srgbClr val="333333"/>
+                </a:solidFill>
+                <a:latin typeface="Calibri"/>
+              </a:defRPr>
+            </a:pPr>
+            <a:r>
+              <a:t>3. UTXO o modelo de cuentas: ¿cual elegir?</a:t>
+            </a:r>
+          </a:p>
+          <a:p>
+            <a:pPr lvl="1">
+              <a:spcAft>
+                <a:spcPts val="400"/>
+              </a:spcAft>
+              <a:defRPr sz="1700">
+                <a:solidFill>
+                  <a:srgbClr val="666666"/>
+                </a:solidFill>
+                <a:latin typeface="Calibri"/>
+              </a:defRPr>
+            </a:pPr>
+            <a:r>
+              <a:t>    Cuentas (ERC-20 like): mas simple, mas intuitivo, consulta de saldo directa.</a:t>
+            </a:r>
+          </a:p>
+          <a:p>
+            <a:pPr lvl="1">
+              <a:spcAft>
+                <a:spcPts val="400"/>
+              </a:spcAft>
+              <a:defRPr sz="1700">
+                <a:solidFill>
+                  <a:srgbClr val="666666"/>
+                </a:solidFill>
+                <a:latin typeface="Calibri"/>
+              </a:defRPr>
+            </a:pPr>
+            <a:r>
+              <a:t>    UTXO (Token SDK): mejor privacidad (tokens anonimos), mas complejo.</a:t>
+            </a:r>
+          </a:p>
+          <a:p>
+            <a:pPr lvl="1">
+              <a:spcAft>
+                <a:spcPts val="400"/>
+              </a:spcAft>
+              <a:defRPr sz="1700">
+                <a:solidFill>
+                  <a:srgbClr val="666666"/>
+                </a:solidFill>
+                <a:latin typeface="Calibri"/>
+              </a:defRPr>
+            </a:pPr>
+            <a:r>
+              <a:t>    Cuentas para: puntos de fidelizacion, creditos, casos con balances consultables.</a:t>
+            </a:r>
+          </a:p>
+          <a:p>
+            <a:pPr lvl="1">
+              <a:spcAft>
+                <a:spcPts val="400"/>
+              </a:spcAft>
+              <a:defRPr sz="1700">
+                <a:solidFill>
+                  <a:srgbClr val="666666"/>
+                </a:solidFill>
+                <a:latin typeface="Calibri"/>
+              </a:defRPr>
+            </a:pPr>
+            <a:r>
+              <a:t>    UTXO para: monedas corporativas con privacidad, tokens de valor sensible.</a:t>
+            </a:r>
+          </a:p>
+          <a:p>
+            <a:pPr lvl="1">
+              <a:spcAft>
+                <a:spcPts val="400"/>
+              </a:spcAft>
+              <a:defRPr sz="1700">
+                <a:solidFill>
+                  <a:srgbClr val="666666"/>
+                </a:solidFill>
+                <a:latin typeface="Calibri"/>
+              </a:defRPr>
+            </a:pPr>
+            <a:r>
+              <a:t>    Regla practica: empezar con cuentas (mas simple); migrar a UTXO si la privacidad es critica.</a:t>
+            </a:r>
+          </a:p>
+        </p:txBody>
+      </p:sp>
+    </p:spTree>
+  </p:cSld>
+  <p:clrMapOvr>
+    <a:masterClrMapping/>
+  </p:clrMapOvr>
+</p:sld>
+</file>
+
+<file path=ppt/slides/slide16.xml><?xml version="1.0" encoding="utf-8"?>
+<p:sld xmlns:a="http://schemas.openxmlformats.org/drawingml/2006/main" xmlns:r="http://schemas.openxmlformats.org/officeDocument/2006/relationships" xmlns:p="http://schemas.openxmlformats.org/presentationml/2006/main">
+  <p:cSld>
+    <p:spTree>
+      <p:nvGrpSpPr>
+        <p:cNvPr id="1" name=""/>
+        <p:cNvGrpSpPr/>
+        <p:nvPr/>
+      </p:nvGrpSpPr>
+      <p:grpSpPr>
+        <a:xfrm>
+          <a:off x="0" y="0"/>
+          <a:ext cx="0" cy="0"/>
+          <a:chOff x="0" y="0"/>
+          <a:chExt cx="0" cy="0"/>
+        </a:xfrm>
+      </p:grpSpPr>
+      <p:sp>
+        <p:nvSpPr>
+          <p:cNvPr id="2" name="Rectangle 1"/>
+          <p:cNvSpPr/>
+          <p:nvPr/>
+        </p:nvSpPr>
+        <p:spPr>
+          <a:xfrm>
+            <a:off x="0" y="0"/>
+            <a:ext cx="12188952" cy="73152"/>
+          </a:xfrm>
+          <a:prstGeom prst="rect">
+            <a:avLst/>
+          </a:prstGeom>
+          <a:solidFill>
+            <a:srgbClr val="22627E"/>
+          </a:solidFill>
+          <a:ln>
+            <a:noFill/>
+          </a:ln>
+        </p:spPr>
+        <p:style>
+          <a:lnRef idx="1">
+            <a:schemeClr val="accent1"/>
+          </a:lnRef>
+          <a:fillRef idx="3">
+            <a:schemeClr val="accent1"/>
+          </a:fillRef>
+          <a:effectRef idx="2">
+            <a:schemeClr val="accent1"/>
+          </a:effectRef>
+          <a:fontRef idx="minor">
+            <a:schemeClr val="lt1"/>
+          </a:fontRef>
+        </p:style>
+        <p:txBody>
+          <a:bodyPr rtlCol="0" anchor="ctr"/>
+          <a:lstStyle/>
+          <a:p>
+            <a:pPr algn="ctr"/>
+            <a:endParaRPr/>
+          </a:p>
+        </p:txBody>
+      </p:sp>
+      <p:sp>
+        <p:nvSpPr>
+          <p:cNvPr id="3" name="TextBox 2"/>
+          <p:cNvSpPr txBox="1"/>
+          <p:nvPr/>
+        </p:nvSpPr>
+        <p:spPr>
+          <a:xfrm>
+            <a:off x="457200" y="274320"/>
+            <a:ext cx="10972800" cy="731520"/>
+          </a:xfrm>
+          <a:prstGeom prst="rect">
+            <a:avLst/>
+          </a:prstGeom>
+          <a:noFill/>
+        </p:spPr>
+        <p:txBody>
+          <a:bodyPr wrap="square"/>
+          <a:lstStyle/>
+          <a:p>
+            <a:pPr algn="l">
+              <a:defRPr sz="3200" b="1">
+                <a:solidFill>
+                  <a:srgbClr val="22627E"/>
+                </a:solidFill>
+                <a:latin typeface="Calibri"/>
+              </a:defRPr>
+            </a:pPr>
+            <a:r>
+              <a:t>Respuestas al debate (2/2)</a:t>
+            </a:r>
+          </a:p>
+        </p:txBody>
+      </p:sp>
+      <p:sp>
+        <p:nvSpPr>
+          <p:cNvPr id="4" name="Rectangle 3"/>
+          <p:cNvSpPr/>
+          <p:nvPr/>
+        </p:nvSpPr>
+        <p:spPr>
+          <a:xfrm>
+            <a:off x="457200" y="1051560"/>
+            <a:ext cx="10972800" cy="27432"/>
+          </a:xfrm>
+          <a:prstGeom prst="rect">
+            <a:avLst/>
+          </a:prstGeom>
+          <a:solidFill>
+            <a:srgbClr val="22627E"/>
+          </a:solidFill>
+          <a:ln>
+            <a:noFill/>
+          </a:ln>
+        </p:spPr>
+        <p:style>
+          <a:lnRef idx="1">
+            <a:schemeClr val="accent1"/>
+          </a:lnRef>
+          <a:fillRef idx="3">
+            <a:schemeClr val="accent1"/>
+          </a:fillRef>
+          <a:effectRef idx="2">
+            <a:schemeClr val="accent1"/>
+          </a:effectRef>
+          <a:fontRef idx="minor">
+            <a:schemeClr val="lt1"/>
+          </a:fontRef>
+        </p:style>
+        <p:txBody>
+          <a:bodyPr rtlCol="0" anchor="ctr"/>
+          <a:lstStyle/>
+          <a:p>
+            <a:pPr algn="ctr"/>
+            <a:endParaRPr/>
+          </a:p>
+        </p:txBody>
+      </p:sp>
+      <p:sp>
+        <p:nvSpPr>
+          <p:cNvPr id="5" name="TextBox 4"/>
+          <p:cNvSpPr txBox="1"/>
+          <p:nvPr/>
+        </p:nvSpPr>
+        <p:spPr>
+          <a:xfrm>
+            <a:off x="640080" y="1280160"/>
+            <a:ext cx="10515600" cy="5029200"/>
+          </a:xfrm>
+          <a:prstGeom prst="rect">
+            <a:avLst/>
+          </a:prstGeom>
+          <a:noFill/>
+        </p:spPr>
+        <p:txBody>
+          <a:bodyPr wrap="square">
+            <a:spAutoFit/>
+          </a:bodyPr>
+          <a:lstStyle/>
+          <a:p>
+            <a:pPr>
+              <a:spcAft>
+                <a:spcPts val="800"/>
+              </a:spcAft>
+              <a:defRPr sz="2000">
+                <a:solidFill>
+                  <a:srgbClr val="333333"/>
+                </a:solidFill>
+                <a:latin typeface="Calibri"/>
+              </a:defRPr>
+            </a:pPr>
+            <a:r>
+              <a:t>4. ¿Pierde sentido la tokenizacion sin mercado secundario?</a:t>
+            </a:r>
+          </a:p>
+          <a:p>
+            <a:pPr lvl="1">
+              <a:spcAft>
+                <a:spcPts val="400"/>
+              </a:spcAft>
+              <a:defRPr sz="1700">
+                <a:solidFill>
+                  <a:srgbClr val="666666"/>
+                </a:solidFill>
+                <a:latin typeface="Calibri"/>
+              </a:defRPr>
+            </a:pPr>
+            <a:r>
+              <a:t>    Depende del caso de uso. Hay tres tipos:</a:t>
+            </a:r>
+          </a:p>
+          <a:p>
+            <a:pPr lvl="1">
+              <a:spcAft>
+                <a:spcPts val="400"/>
+              </a:spcAft>
+              <a:defRPr sz="1700">
+                <a:solidFill>
+                  <a:srgbClr val="666666"/>
+                </a:solidFill>
+                <a:latin typeface="Calibri"/>
+              </a:defRPr>
+            </a:pPr>
+            <a:r>
+              <a:t>      a) Token que representa valor transferible libremente (SI necesita mercado).</a:t>
+            </a:r>
+          </a:p>
+          <a:p>
+            <a:pPr lvl="1">
+              <a:spcAft>
+                <a:spcPts val="400"/>
+              </a:spcAft>
+              <a:defRPr sz="1700">
+                <a:solidFill>
+                  <a:srgbClr val="666666"/>
+                </a:solidFill>
+                <a:latin typeface="Calibri"/>
+              </a:defRPr>
+            </a:pPr>
+            <a:r>
+              <a:t>      b) Token que representa algo trazable (trazabilidad, certificaciones) — NO necesita mercado.</a:t>
+            </a:r>
+          </a:p>
+          <a:p>
+            <a:pPr lvl="1">
+              <a:spcAft>
+                <a:spcPts val="400"/>
+              </a:spcAft>
+              <a:defRPr sz="1700">
+                <a:solidFill>
+                  <a:srgbClr val="666666"/>
+                </a:solidFill>
+                <a:latin typeface="Calibri"/>
+              </a:defRPr>
+            </a:pPr>
+            <a:r>
+              <a:t>      c) Token que representa un derecho (acceso, fidelizacion, voto) — NO necesita mercado.</a:t>
+            </a:r>
+          </a:p>
+          <a:p>
+            <a:pPr lvl="1">
+              <a:spcAft>
+                <a:spcPts val="400"/>
+              </a:spcAft>
+              <a:defRPr sz="1700">
+                <a:solidFill>
+                  <a:srgbClr val="666666"/>
+                </a:solidFill>
+                <a:latin typeface="Calibri"/>
+              </a:defRPr>
+            </a:pPr>
+            <a:r>
+              <a:t>    Muchas aplicaciones enterprise encajan en b) y c): el valor esta en la trazabilidad/control,</a:t>
+            </a:r>
+          </a:p>
+          <a:p>
+            <a:pPr lvl="1">
+              <a:spcAft>
+                <a:spcPts val="400"/>
+              </a:spcAft>
+              <a:defRPr sz="1700">
+                <a:solidFill>
+                  <a:srgbClr val="666666"/>
+                </a:solidFill>
+                <a:latin typeface="Calibri"/>
+              </a:defRPr>
+            </a:pPr>
+            <a:r>
+              <a:t>      no en la especulacion o el trading.</a:t>
+            </a:r>
+          </a:p>
+          <a:p>
+            <a:pPr lvl="1">
+              <a:spcAft>
+                <a:spcPts val="400"/>
+              </a:spcAft>
+              <a:defRPr sz="1700">
+                <a:solidFill>
+                  <a:srgbClr val="666666"/>
+                </a:solidFill>
+                <a:latin typeface="Calibri"/>
+              </a:defRPr>
+            </a:pPr>
+            <a:r>
+              <a:t>    Ademas, nada impide crear mercados secundarios INTERNOS al consorcio (OTC, subastas).</a:t>
+            </a:r>
+          </a:p>
+          <a:p>
+            <a:pPr>
+              <a:spcAft>
+                <a:spcPts val="800"/>
+              </a:spcAft>
+              <a:defRPr sz="2000">
+                <a:solidFill>
+                  <a:srgbClr val="333333"/>
+                </a:solidFill>
+                <a:latin typeface="Calibri"/>
+              </a:defRPr>
+            </a:pPr>
+            <a:r>
+              <a:t>5. ¿Como afecta la privacidad de Fabric al diseño de un token enterprise?</a:t>
+            </a:r>
+          </a:p>
+          <a:p>
+            <a:pPr lvl="1">
+              <a:spcAft>
+                <a:spcPts val="400"/>
+              </a:spcAft>
+              <a:defRPr sz="1700">
+                <a:solidFill>
+                  <a:srgbClr val="666666"/>
+                </a:solidFill>
+                <a:latin typeface="Calibri"/>
+              </a:defRPr>
+            </a:pPr>
+            <a:r>
+              <a:t>    Canales: permiten separar tokens por grupo de orgs (no todos ven todos los tokens).</a:t>
+            </a:r>
+          </a:p>
+          <a:p>
+            <a:pPr lvl="1">
+              <a:spcAft>
+                <a:spcPts val="400"/>
+              </a:spcAft>
+              <a:defRPr sz="1700">
+                <a:solidFill>
+                  <a:srgbClr val="666666"/>
+                </a:solidFill>
+                <a:latin typeface="Calibri"/>
+              </a:defRPr>
+            </a:pPr>
+            <a:r>
+              <a:t>    Private Data Collections: ocultar importes y detalles entre partes del contrato.</a:t>
+            </a:r>
+          </a:p>
+          <a:p>
+            <a:pPr lvl="1">
+              <a:spcAft>
+                <a:spcPts val="400"/>
+              </a:spcAft>
+              <a:defRPr sz="1700">
+                <a:solidFill>
+                  <a:srgbClr val="666666"/>
+                </a:solidFill>
+                <a:latin typeface="Calibri"/>
+              </a:defRPr>
+            </a:pPr>
+            <a:r>
+              <a:t>    Zero-Knowledge Proofs (via Token SDK): probar propiedad sin revelar cantidad.</a:t>
+            </a:r>
+          </a:p>
+          <a:p>
+            <a:pPr lvl="1">
+              <a:spcAft>
+                <a:spcPts val="400"/>
+              </a:spcAft>
+              <a:defRPr sz="1700">
+                <a:solidFill>
+                  <a:srgbClr val="666666"/>
+                </a:solidFill>
+                <a:latin typeface="Calibri"/>
+              </a:defRPr>
+            </a:pPr>
+            <a:r>
+              <a:t>    Efecto practico: puedes tener un token cuyo propietario es publico pero el balance es privado.</a:t>
+            </a:r>
+          </a:p>
+          <a:p>
+            <a:pPr lvl="1">
+              <a:spcAft>
+                <a:spcPts val="400"/>
+              </a:spcAft>
+              <a:defRPr sz="1700">
+                <a:solidFill>
+                  <a:srgbClr val="666666"/>
+                </a:solidFill>
+                <a:latin typeface="Calibri"/>
+              </a:defRPr>
+            </a:pPr>
+            <a:r>
+              <a:t>    Tradeoff: mas privacidad = mas complejidad operativa.</a:t>
+            </a:r>
+          </a:p>
+          <a:p>
+            <a:pPr lvl="1">
+              <a:spcAft>
+                <a:spcPts val="400"/>
+              </a:spcAft>
+              <a:defRPr sz="1700">
+                <a:solidFill>
+                  <a:srgbClr val="666666"/>
+                </a:solidFill>
+                <a:latin typeface="Calibri"/>
+              </a:defRPr>
+            </a:pPr>
+            <a:r>
+              <a:t>    Regla: empezar simple (todo publico en el canal), anadir privacidad solo cuando sea critico.</a:t>
+            </a:r>
+          </a:p>
+        </p:txBody>
+      </p:sp>
+    </p:spTree>
+  </p:cSld>
+  <p:clrMapOvr>
+    <a:masterClrMapping/>
+  </p:clrMapOvr>
+</p:sld>
+</file>
+
+<file path=ppt/slides/slide17.xml><?xml version="1.0" encoding="utf-8"?>
+<p:sld xmlns:a="http://schemas.openxmlformats.org/drawingml/2006/main" xmlns:r="http://schemas.openxmlformats.org/officeDocument/2006/relationships" xmlns:p="http://schemas.openxmlformats.org/presentationml/2006/main">
+  <p:cSld>
+    <p:spTree>
+      <p:nvGrpSpPr>
+        <p:cNvPr id="1" name=""/>
+        <p:cNvGrpSpPr/>
+        <p:nvPr/>
+      </p:nvGrpSpPr>
+      <p:grpSpPr>
+        <a:xfrm>
+          <a:off x="0" y="0"/>
+          <a:ext cx="0" cy="0"/>
+          <a:chOff x="0" y="0"/>
+          <a:chExt cx="0" cy="0"/>
+        </a:xfrm>
+      </p:grpSpPr>
+      <p:sp>
+        <p:nvSpPr>
+          <p:cNvPr id="2" name="Rectangle 1"/>
+          <p:cNvSpPr/>
+          <p:nvPr/>
+        </p:nvSpPr>
+        <p:spPr>
+          <a:xfrm>
+            <a:off x="0" y="0"/>
             <a:ext cx="12188952" cy="6858000"/>
           </a:xfrm>
           <a:prstGeom prst="rect">
@@ -5988,6 +6860,938 @@
             </a:pPr>
             <a:r>
               <a:t>7. ¿Que ventaja ofrece la privacidad de Fabric para tokens enterprise?</a:t>
+            </a:r>
+          </a:p>
+        </p:txBody>
+      </p:sp>
+    </p:spTree>
+  </p:cSld>
+  <p:clrMapOvr>
+    <a:masterClrMapping/>
+  </p:clrMapOvr>
+</p:sld>
+</file>
+
+<file path=ppt/slides/slide18.xml><?xml version="1.0" encoding="utf-8"?>
+<p:sld xmlns:a="http://schemas.openxmlformats.org/drawingml/2006/main" xmlns:r="http://schemas.openxmlformats.org/officeDocument/2006/relationships" xmlns:p="http://schemas.openxmlformats.org/presentationml/2006/main">
+  <p:cSld>
+    <p:spTree>
+      <p:nvGrpSpPr>
+        <p:cNvPr id="1" name=""/>
+        <p:cNvGrpSpPr/>
+        <p:nvPr/>
+      </p:nvGrpSpPr>
+      <p:grpSpPr>
+        <a:xfrm>
+          <a:off x="0" y="0"/>
+          <a:ext cx="0" cy="0"/>
+          <a:chOff x="0" y="0"/>
+          <a:chExt cx="0" cy="0"/>
+        </a:xfrm>
+      </p:grpSpPr>
+      <p:sp>
+        <p:nvSpPr>
+          <p:cNvPr id="2" name="Rectangle 1"/>
+          <p:cNvSpPr/>
+          <p:nvPr/>
+        </p:nvSpPr>
+        <p:spPr>
+          <a:xfrm>
+            <a:off x="0" y="0"/>
+            <a:ext cx="12188952" cy="73152"/>
+          </a:xfrm>
+          <a:prstGeom prst="rect">
+            <a:avLst/>
+          </a:prstGeom>
+          <a:solidFill>
+            <a:srgbClr val="22627E"/>
+          </a:solidFill>
+          <a:ln>
+            <a:noFill/>
+          </a:ln>
+        </p:spPr>
+        <p:style>
+          <a:lnRef idx="1">
+            <a:schemeClr val="accent1"/>
+          </a:lnRef>
+          <a:fillRef idx="3">
+            <a:schemeClr val="accent1"/>
+          </a:fillRef>
+          <a:effectRef idx="2">
+            <a:schemeClr val="accent1"/>
+          </a:effectRef>
+          <a:fontRef idx="minor">
+            <a:schemeClr val="lt1"/>
+          </a:fontRef>
+        </p:style>
+        <p:txBody>
+          <a:bodyPr rtlCol="0" anchor="ctr"/>
+          <a:lstStyle/>
+          <a:p>
+            <a:pPr algn="ctr"/>
+            <a:endParaRPr/>
+          </a:p>
+        </p:txBody>
+      </p:sp>
+      <p:sp>
+        <p:nvSpPr>
+          <p:cNvPr id="3" name="TextBox 2"/>
+          <p:cNvSpPr txBox="1"/>
+          <p:nvPr/>
+        </p:nvSpPr>
+        <p:spPr>
+          <a:xfrm>
+            <a:off x="457200" y="274320"/>
+            <a:ext cx="10972800" cy="731520"/>
+          </a:xfrm>
+          <a:prstGeom prst="rect">
+            <a:avLst/>
+          </a:prstGeom>
+          <a:noFill/>
+        </p:spPr>
+        <p:txBody>
+          <a:bodyPr wrap="square"/>
+          <a:lstStyle/>
+          <a:p>
+            <a:pPr algn="l">
+              <a:defRPr sz="3200" b="1">
+                <a:solidFill>
+                  <a:srgbClr val="22627E"/>
+                </a:solidFill>
+                <a:latin typeface="Calibri"/>
+              </a:defRPr>
+            </a:pPr>
+            <a:r>
+              <a:t>Respuestas al repaso (1/2)</a:t>
+            </a:r>
+          </a:p>
+        </p:txBody>
+      </p:sp>
+      <p:sp>
+        <p:nvSpPr>
+          <p:cNvPr id="4" name="Rectangle 3"/>
+          <p:cNvSpPr/>
+          <p:nvPr/>
+        </p:nvSpPr>
+        <p:spPr>
+          <a:xfrm>
+            <a:off x="457200" y="1051560"/>
+            <a:ext cx="10972800" cy="27432"/>
+          </a:xfrm>
+          <a:prstGeom prst="rect">
+            <a:avLst/>
+          </a:prstGeom>
+          <a:solidFill>
+            <a:srgbClr val="22627E"/>
+          </a:solidFill>
+          <a:ln>
+            <a:noFill/>
+          </a:ln>
+        </p:spPr>
+        <p:style>
+          <a:lnRef idx="1">
+            <a:schemeClr val="accent1"/>
+          </a:lnRef>
+          <a:fillRef idx="3">
+            <a:schemeClr val="accent1"/>
+          </a:fillRef>
+          <a:effectRef idx="2">
+            <a:schemeClr val="accent1"/>
+          </a:effectRef>
+          <a:fontRef idx="minor">
+            <a:schemeClr val="lt1"/>
+          </a:fontRef>
+        </p:style>
+        <p:txBody>
+          <a:bodyPr rtlCol="0" anchor="ctr"/>
+          <a:lstStyle/>
+          <a:p>
+            <a:pPr algn="ctr"/>
+            <a:endParaRPr/>
+          </a:p>
+        </p:txBody>
+      </p:sp>
+      <p:sp>
+        <p:nvSpPr>
+          <p:cNvPr id="5" name="TextBox 4"/>
+          <p:cNvSpPr txBox="1"/>
+          <p:nvPr/>
+        </p:nvSpPr>
+        <p:spPr>
+          <a:xfrm>
+            <a:off x="640080" y="1280160"/>
+            <a:ext cx="10515600" cy="5029200"/>
+          </a:xfrm>
+          <a:prstGeom prst="rect">
+            <a:avLst/>
+          </a:prstGeom>
+          <a:noFill/>
+        </p:spPr>
+        <p:txBody>
+          <a:bodyPr wrap="square">
+            <a:spAutoFit/>
+          </a:bodyPr>
+          <a:lstStyle/>
+          <a:p>
+            <a:pPr>
+              <a:spcAft>
+                <a:spcPts val="800"/>
+              </a:spcAft>
+              <a:defRPr sz="2000">
+                <a:solidFill>
+                  <a:srgbClr val="333333"/>
+                </a:solidFill>
+                <a:latin typeface="Calibri"/>
+              </a:defRPr>
+            </a:pPr>
+            <a:r>
+              <a:t>1. Diferencia principal entre tokens Ethereum y Fabric:</a:t>
+            </a:r>
+          </a:p>
+          <a:p>
+            <a:pPr lvl="1">
+              <a:spcAft>
+                <a:spcPts val="400"/>
+              </a:spcAft>
+              <a:defRPr sz="1700">
+                <a:solidFill>
+                  <a:srgbClr val="666666"/>
+                </a:solidFill>
+                <a:latin typeface="Calibri"/>
+              </a:defRPr>
+            </a:pPr>
+            <a:r>
+              <a:t>    Ethereum: cualquiera despliega tokens (ERC-20/721/1155), permissionless, identidad pseudonima.</a:t>
+            </a:r>
+          </a:p>
+          <a:p>
+            <a:pPr lvl="1">
+              <a:spcAft>
+                <a:spcPts val="400"/>
+              </a:spcAft>
+              <a:defRPr sz="1700">
+                <a:solidFill>
+                  <a:srgbClr val="666666"/>
+                </a:solidFill>
+                <a:latin typeface="Calibri"/>
+              </a:defRPr>
+            </a:pPr>
+            <a:r>
+              <a:t>    Fabric: solo entidades autorizadas (permissioned), identidad real con certificado X.509,</a:t>
+            </a:r>
+          </a:p>
+          <a:p>
+            <a:pPr lvl="1">
+              <a:spcAft>
+                <a:spcPts val="400"/>
+              </a:spcAft>
+              <a:defRPr sz="1700">
+                <a:solidFill>
+                  <a:srgbClr val="666666"/>
+                </a:solidFill>
+                <a:latin typeface="Calibri"/>
+              </a:defRPr>
+            </a:pPr>
+            <a:r>
+              <a:t>      sin moneda nativa, flexibilidad total en el diseño del token.</a:t>
+            </a:r>
+          </a:p>
+          <a:p>
+            <a:pPr>
+              <a:spcAft>
+                <a:spcPts val="800"/>
+              </a:spcAft>
+              <a:defRPr sz="2000">
+                <a:solidFill>
+                  <a:srgbClr val="333333"/>
+                </a:solidFill>
+                <a:latin typeface="Calibri"/>
+              </a:defRPr>
+            </a:pPr>
+            <a:r>
+              <a:t>2. Tres formas de implementar tokens en Fabric:</a:t>
+            </a:r>
+          </a:p>
+          <a:p>
+            <a:pPr lvl="1">
+              <a:spcAft>
+                <a:spcPts val="400"/>
+              </a:spcAft>
+              <a:defRPr sz="1700">
+                <a:solidFill>
+                  <a:srgbClr val="666666"/>
+                </a:solidFill>
+                <a:latin typeface="Calibri"/>
+              </a:defRPr>
+            </a:pPr>
+            <a:r>
+              <a:t>    Chaincode custom desde cero (maximo control, mas trabajo).</a:t>
+            </a:r>
+          </a:p>
+          <a:p>
+            <a:pPr lvl="1">
+              <a:spcAft>
+                <a:spcPts val="400"/>
+              </a:spcAft>
+              <a:defRPr sz="1700">
+                <a:solidFill>
+                  <a:srgbClr val="666666"/>
+                </a:solidFill>
+                <a:latin typeface="Calibri"/>
+              </a:defRPr>
+            </a:pPr>
+            <a:r>
+              <a:t>    Fabric Token SDK (modelo UTXO, privacidad avanzada, curva de aprendizaje).</a:t>
+            </a:r>
+          </a:p>
+          <a:p>
+            <a:pPr lvl="1">
+              <a:spcAft>
+                <a:spcPts val="400"/>
+              </a:spcAft>
+              <a:defRPr sz="1700">
+                <a:solidFill>
+                  <a:srgbClr val="666666"/>
+                </a:solidFill>
+                <a:latin typeface="Calibri"/>
+              </a:defRPr>
+            </a:pPr>
+            <a:r>
+              <a:t>    Fabric Samples token-erc-20 (modelo de cuentas tipo ERC-20, mas didactico).</a:t>
+            </a:r>
+          </a:p>
+          <a:p>
+            <a:pPr>
+              <a:spcAft>
+                <a:spcPts val="800"/>
+              </a:spcAft>
+              <a:defRPr sz="2000">
+                <a:solidFill>
+                  <a:srgbClr val="333333"/>
+                </a:solidFill>
+                <a:latin typeface="Calibri"/>
+              </a:defRPr>
+            </a:pPr>
+            <a:r>
+              <a:t>3. Modelo UTXO vs modelo de cuentas:</a:t>
+            </a:r>
+          </a:p>
+          <a:p>
+            <a:pPr lvl="1">
+              <a:spcAft>
+                <a:spcPts val="400"/>
+              </a:spcAft>
+              <a:defRPr sz="1700">
+                <a:solidFill>
+                  <a:srgbClr val="666666"/>
+                </a:solidFill>
+                <a:latin typeface="Calibri"/>
+              </a:defRPr>
+            </a:pPr>
+            <a:r>
+              <a:t>    UTXO: cada token es un 'billete' unico e indivisible. Transferir = consumir unos y crear otros.</a:t>
+            </a:r>
+          </a:p>
+          <a:p>
+            <a:pPr lvl="1">
+              <a:spcAft>
+                <a:spcPts val="400"/>
+              </a:spcAft>
+              <a:defRPr sz="1700">
+                <a:solidFill>
+                  <a:srgbClr val="666666"/>
+                </a:solidFill>
+                <a:latin typeface="Calibri"/>
+              </a:defRPr>
+            </a:pPr>
+            <a:r>
+              <a:t>      Ejemplo: Bitcoin — la privacidad es mayor porque no hay balance visible publico.</a:t>
+            </a:r>
+          </a:p>
+          <a:p>
+            <a:pPr lvl="1">
+              <a:spcAft>
+                <a:spcPts val="400"/>
+              </a:spcAft>
+              <a:defRPr sz="1700">
+                <a:solidFill>
+                  <a:srgbClr val="666666"/>
+                </a:solidFill>
+                <a:latin typeface="Calibri"/>
+              </a:defRPr>
+            </a:pPr>
+            <a:r>
+              <a:t>    Cuentas: balance numerico por usuario. Transferir = restar de uno, sumar a otro.</a:t>
+            </a:r>
+          </a:p>
+          <a:p>
+            <a:pPr lvl="1">
+              <a:spcAft>
+                <a:spcPts val="400"/>
+              </a:spcAft>
+              <a:defRPr sz="1700">
+                <a:solidFill>
+                  <a:srgbClr val="666666"/>
+                </a:solidFill>
+                <a:latin typeface="Calibri"/>
+              </a:defRPr>
+            </a:pPr>
+            <a:r>
+              <a:t>      Ejemplo: Ethereum — mas intuitivo pero el balance queda expuesto.</a:t>
+            </a:r>
+          </a:p>
+          <a:p>
+            <a:pPr>
+              <a:spcAft>
+                <a:spcPts val="800"/>
+              </a:spcAft>
+              <a:defRPr sz="2000">
+                <a:solidFill>
+                  <a:srgbClr val="333333"/>
+                </a:solidFill>
+                <a:latin typeface="Calibri"/>
+              </a:defRPr>
+            </a:pPr>
+            <a:r>
+              <a:t>4. Operaciones del Fabric Token SDK:</a:t>
+            </a:r>
+          </a:p>
+          <a:p>
+            <a:pPr lvl="1">
+              <a:spcAft>
+                <a:spcPts val="400"/>
+              </a:spcAft>
+              <a:defRPr sz="1700">
+                <a:solidFill>
+                  <a:srgbClr val="666666"/>
+                </a:solidFill>
+                <a:latin typeface="Calibri"/>
+              </a:defRPr>
+            </a:pPr>
+            <a:r>
+              <a:t>    Issue (crear): emitir nuevos tokens, equivalente al Mint.</a:t>
+            </a:r>
+          </a:p>
+          <a:p>
+            <a:pPr lvl="1">
+              <a:spcAft>
+                <a:spcPts val="400"/>
+              </a:spcAft>
+              <a:defRPr sz="1700">
+                <a:solidFill>
+                  <a:srgbClr val="666666"/>
+                </a:solidFill>
+                <a:latin typeface="Calibri"/>
+              </a:defRPr>
+            </a:pPr>
+            <a:r>
+              <a:t>    Transfer: enviar tokens de un propietario a otro.</a:t>
+            </a:r>
+          </a:p>
+          <a:p>
+            <a:pPr lvl="1">
+              <a:spcAft>
+                <a:spcPts val="400"/>
+              </a:spcAft>
+              <a:defRPr sz="1700">
+                <a:solidFill>
+                  <a:srgbClr val="666666"/>
+                </a:solidFill>
+                <a:latin typeface="Calibri"/>
+              </a:defRPr>
+            </a:pPr>
+            <a:r>
+              <a:t>    Redeem (destruir): equivalente al Burn.</a:t>
+            </a:r>
+          </a:p>
+          <a:p>
+            <a:pPr lvl="1">
+              <a:spcAft>
+                <a:spcPts val="400"/>
+              </a:spcAft>
+              <a:defRPr sz="1700">
+                <a:solidFill>
+                  <a:srgbClr val="666666"/>
+                </a:solidFill>
+                <a:latin typeface="Calibri"/>
+              </a:defRPr>
+            </a:pPr>
+            <a:r>
+              <a:t>    List: consultar los tokens propios.</a:t>
+            </a:r>
+          </a:p>
+          <a:p>
+            <a:pPr lvl="1">
+              <a:spcAft>
+                <a:spcPts val="400"/>
+              </a:spcAft>
+              <a:defRPr sz="1700">
+                <a:solidFill>
+                  <a:srgbClr val="666666"/>
+                </a:solidFill>
+                <a:latin typeface="Calibri"/>
+              </a:defRPr>
+            </a:pPr>
+            <a:r>
+              <a:t>    Soporta tokens fungibles y no fungibles con la misma infraestructura.</a:t>
+            </a:r>
+          </a:p>
+        </p:txBody>
+      </p:sp>
+    </p:spTree>
+  </p:cSld>
+  <p:clrMapOvr>
+    <a:masterClrMapping/>
+  </p:clrMapOvr>
+</p:sld>
+</file>
+
+<file path=ppt/slides/slide19.xml><?xml version="1.0" encoding="utf-8"?>
+<p:sld xmlns:a="http://schemas.openxmlformats.org/drawingml/2006/main" xmlns:r="http://schemas.openxmlformats.org/officeDocument/2006/relationships" xmlns:p="http://schemas.openxmlformats.org/presentationml/2006/main">
+  <p:cSld>
+    <p:spTree>
+      <p:nvGrpSpPr>
+        <p:cNvPr id="1" name=""/>
+        <p:cNvGrpSpPr/>
+        <p:nvPr/>
+      </p:nvGrpSpPr>
+      <p:grpSpPr>
+        <a:xfrm>
+          <a:off x="0" y="0"/>
+          <a:ext cx="0" cy="0"/>
+          <a:chOff x="0" y="0"/>
+          <a:chExt cx="0" cy="0"/>
+        </a:xfrm>
+      </p:grpSpPr>
+      <p:sp>
+        <p:nvSpPr>
+          <p:cNvPr id="2" name="Rectangle 1"/>
+          <p:cNvSpPr/>
+          <p:nvPr/>
+        </p:nvSpPr>
+        <p:spPr>
+          <a:xfrm>
+            <a:off x="0" y="0"/>
+            <a:ext cx="12188952" cy="73152"/>
+          </a:xfrm>
+          <a:prstGeom prst="rect">
+            <a:avLst/>
+          </a:prstGeom>
+          <a:solidFill>
+            <a:srgbClr val="22627E"/>
+          </a:solidFill>
+          <a:ln>
+            <a:noFill/>
+          </a:ln>
+        </p:spPr>
+        <p:style>
+          <a:lnRef idx="1">
+            <a:schemeClr val="accent1"/>
+          </a:lnRef>
+          <a:fillRef idx="3">
+            <a:schemeClr val="accent1"/>
+          </a:fillRef>
+          <a:effectRef idx="2">
+            <a:schemeClr val="accent1"/>
+          </a:effectRef>
+          <a:fontRef idx="minor">
+            <a:schemeClr val="lt1"/>
+          </a:fontRef>
+        </p:style>
+        <p:txBody>
+          <a:bodyPr rtlCol="0" anchor="ctr"/>
+          <a:lstStyle/>
+          <a:p>
+            <a:pPr algn="ctr"/>
+            <a:endParaRPr/>
+          </a:p>
+        </p:txBody>
+      </p:sp>
+      <p:sp>
+        <p:nvSpPr>
+          <p:cNvPr id="3" name="TextBox 2"/>
+          <p:cNvSpPr txBox="1"/>
+          <p:nvPr/>
+        </p:nvSpPr>
+        <p:spPr>
+          <a:xfrm>
+            <a:off x="457200" y="274320"/>
+            <a:ext cx="10972800" cy="731520"/>
+          </a:xfrm>
+          <a:prstGeom prst="rect">
+            <a:avLst/>
+          </a:prstGeom>
+          <a:noFill/>
+        </p:spPr>
+        <p:txBody>
+          <a:bodyPr wrap="square"/>
+          <a:lstStyle/>
+          <a:p>
+            <a:pPr algn="l">
+              <a:defRPr sz="3200" b="1">
+                <a:solidFill>
+                  <a:srgbClr val="22627E"/>
+                </a:solidFill>
+                <a:latin typeface="Calibri"/>
+              </a:defRPr>
+            </a:pPr>
+            <a:r>
+              <a:t>Respuestas al repaso (2/2)</a:t>
+            </a:r>
+          </a:p>
+        </p:txBody>
+      </p:sp>
+      <p:sp>
+        <p:nvSpPr>
+          <p:cNvPr id="4" name="Rectangle 3"/>
+          <p:cNvSpPr/>
+          <p:nvPr/>
+        </p:nvSpPr>
+        <p:spPr>
+          <a:xfrm>
+            <a:off x="457200" y="1051560"/>
+            <a:ext cx="10972800" cy="27432"/>
+          </a:xfrm>
+          <a:prstGeom prst="rect">
+            <a:avLst/>
+          </a:prstGeom>
+          <a:solidFill>
+            <a:srgbClr val="22627E"/>
+          </a:solidFill>
+          <a:ln>
+            <a:noFill/>
+          </a:ln>
+        </p:spPr>
+        <p:style>
+          <a:lnRef idx="1">
+            <a:schemeClr val="accent1"/>
+          </a:lnRef>
+          <a:fillRef idx="3">
+            <a:schemeClr val="accent1"/>
+          </a:fillRef>
+          <a:effectRef idx="2">
+            <a:schemeClr val="accent1"/>
+          </a:effectRef>
+          <a:fontRef idx="minor">
+            <a:schemeClr val="lt1"/>
+          </a:fontRef>
+        </p:style>
+        <p:txBody>
+          <a:bodyPr rtlCol="0" anchor="ctr"/>
+          <a:lstStyle/>
+          <a:p>
+            <a:pPr algn="ctr"/>
+            <a:endParaRPr/>
+          </a:p>
+        </p:txBody>
+      </p:sp>
+      <p:sp>
+        <p:nvSpPr>
+          <p:cNvPr id="5" name="TextBox 4"/>
+          <p:cNvSpPr txBox="1"/>
+          <p:nvPr/>
+        </p:nvSpPr>
+        <p:spPr>
+          <a:xfrm>
+            <a:off x="640080" y="1280160"/>
+            <a:ext cx="10515600" cy="5029200"/>
+          </a:xfrm>
+          <a:prstGeom prst="rect">
+            <a:avLst/>
+          </a:prstGeom>
+          <a:noFill/>
+        </p:spPr>
+        <p:txBody>
+          <a:bodyPr wrap="square">
+            <a:spAutoFit/>
+          </a:bodyPr>
+          <a:lstStyle/>
+          <a:p>
+            <a:pPr>
+              <a:spcAft>
+                <a:spcPts val="800"/>
+              </a:spcAft>
+              <a:defRPr sz="2000">
+                <a:solidFill>
+                  <a:srgbClr val="333333"/>
+                </a:solidFill>
+                <a:latin typeface="Calibri"/>
+              </a:defRPr>
+            </a:pPr>
+            <a:r>
+              <a:t>5. ¿Por que Fabric no tiene moneda nativa?</a:t>
+            </a:r>
+          </a:p>
+          <a:p>
+            <a:pPr lvl="1">
+              <a:spcAft>
+                <a:spcPts val="400"/>
+              </a:spcAft>
+              <a:defRPr sz="1700">
+                <a:solidFill>
+                  <a:srgbClr val="666666"/>
+                </a:solidFill>
+                <a:latin typeface="Calibri"/>
+              </a:defRPr>
+            </a:pPr>
+            <a:r>
+              <a:t>    Fabric es una plataforma permissioned: ya conoces a todos los participantes.</a:t>
+            </a:r>
+          </a:p>
+          <a:p>
+            <a:pPr lvl="1">
+              <a:spcAft>
+                <a:spcPts val="400"/>
+              </a:spcAft>
+              <a:defRPr sz="1700">
+                <a:solidFill>
+                  <a:srgbClr val="666666"/>
+                </a:solidFill>
+                <a:latin typeface="Calibri"/>
+              </a:defRPr>
+            </a:pPr>
+            <a:r>
+              <a:t>    No hace falta incentivar a mineros desconocidos (como ETH incentiva a los mineros Ethereum).</a:t>
+            </a:r>
+          </a:p>
+          <a:p>
+            <a:pPr lvl="1">
+              <a:spcAft>
+                <a:spcPts val="400"/>
+              </a:spcAft>
+              <a:defRPr sz="1700">
+                <a:solidFill>
+                  <a:srgbClr val="666666"/>
+                </a:solidFill>
+                <a:latin typeface="Calibri"/>
+              </a:defRPr>
+            </a:pPr>
+            <a:r>
+              <a:t>    Los costes operativos los asumen las orgs del consorcio directamente.</a:t>
+            </a:r>
+          </a:p>
+          <a:p>
+            <a:pPr lvl="1">
+              <a:spcAft>
+                <a:spcPts val="400"/>
+              </a:spcAft>
+              <a:defRPr sz="1700">
+                <a:solidFill>
+                  <a:srgbClr val="666666"/>
+                </a:solidFill>
+                <a:latin typeface="Calibri"/>
+              </a:defRPr>
+            </a:pPr>
+            <a:r>
+              <a:t>    Sin gas = sin mercado especulativo sobre la capacidad de red.</a:t>
+            </a:r>
+          </a:p>
+          <a:p>
+            <a:pPr lvl="1">
+              <a:spcAft>
+                <a:spcPts val="400"/>
+              </a:spcAft>
+              <a:defRPr sz="1700">
+                <a:solidFill>
+                  <a:srgbClr val="666666"/>
+                </a:solidFill>
+                <a:latin typeface="Calibri"/>
+              </a:defRPr>
+            </a:pPr>
+            <a:r>
+              <a:t>    Ventaja: las transacciones no tienen coste por-operacion para los usuarios.</a:t>
+            </a:r>
+          </a:p>
+          <a:p>
+            <a:pPr>
+              <a:spcAft>
+                <a:spcPts val="800"/>
+              </a:spcAft>
+              <a:defRPr sz="2000">
+                <a:solidFill>
+                  <a:srgbClr val="333333"/>
+                </a:solidFill>
+                <a:latin typeface="Calibri"/>
+              </a:defRPr>
+            </a:pPr>
+            <a:r>
+              <a:t>6. Ejemplo de token enterprise con sentido en Fabric:</a:t>
+            </a:r>
+          </a:p>
+          <a:p>
+            <a:pPr lvl="1">
+              <a:spcAft>
+                <a:spcPts val="400"/>
+              </a:spcAft>
+              <a:defRPr sz="1700">
+                <a:solidFill>
+                  <a:srgbClr val="666666"/>
+                </a:solidFill>
+                <a:latin typeface="Calibri"/>
+              </a:defRPr>
+            </a:pPr>
+            <a:r>
+              <a:t>    Hotel + Cafeteria compartiendo puntos de fidelizacion (caso del Modulo 6).</a:t>
+            </a:r>
+          </a:p>
+          <a:p>
+            <a:pPr lvl="1">
+              <a:spcAft>
+                <a:spcPts val="400"/>
+              </a:spcAft>
+              <a:defRPr sz="1700">
+                <a:solidFill>
+                  <a:srgbClr val="666666"/>
+                </a:solidFill>
+                <a:latin typeface="Calibri"/>
+              </a:defRPr>
+            </a:pPr>
+            <a:r>
+              <a:t>    Bancos europeos tokenizando bonos corporativos (Santander, EIB).</a:t>
+            </a:r>
+          </a:p>
+          <a:p>
+            <a:pPr lvl="1">
+              <a:spcAft>
+                <a:spcPts val="400"/>
+              </a:spcAft>
+              <a:defRPr sz="1700">
+                <a:solidFill>
+                  <a:srgbClr val="666666"/>
+                </a:solidFill>
+                <a:latin typeface="Calibri"/>
+              </a:defRPr>
+            </a:pPr>
+            <a:r>
+              <a:t>    Trazabilidad de lotes alimentarios (Walmart Food Trust).</a:t>
+            </a:r>
+          </a:p>
+          <a:p>
+            <a:pPr lvl="1">
+              <a:spcAft>
+                <a:spcPts val="400"/>
+              </a:spcAft>
+              <a:defRPr sz="1700">
+                <a:solidFill>
+                  <a:srgbClr val="666666"/>
+                </a:solidFill>
+                <a:latin typeface="Calibri"/>
+              </a:defRPr>
+            </a:pPr>
+            <a:r>
+              <a:t>    Certificados de formacion entre universidades y empresas.</a:t>
+            </a:r>
+          </a:p>
+          <a:p>
+            <a:pPr lvl="1">
+              <a:spcAft>
+                <a:spcPts val="400"/>
+              </a:spcAft>
+              <a:defRPr sz="1700">
+                <a:solidFill>
+                  <a:srgbClr val="666666"/>
+                </a:solidFill>
+                <a:latin typeface="Calibri"/>
+              </a:defRPr>
+            </a:pPr>
+            <a:r>
+              <a:t>    Creditos de carbono verificables entre emisores y auditores.</a:t>
+            </a:r>
+          </a:p>
+          <a:p>
+            <a:pPr>
+              <a:spcAft>
+                <a:spcPts val="800"/>
+              </a:spcAft>
+              <a:defRPr sz="2000">
+                <a:solidFill>
+                  <a:srgbClr val="333333"/>
+                </a:solidFill>
+                <a:latin typeface="Calibri"/>
+              </a:defRPr>
+            </a:pPr>
+            <a:r>
+              <a:t>7. Ventaja de la privacidad de Fabric para tokens enterprise:</a:t>
+            </a:r>
+          </a:p>
+          <a:p>
+            <a:pPr lvl="1">
+              <a:spcAft>
+                <a:spcPts val="400"/>
+              </a:spcAft>
+              <a:defRPr sz="1700">
+                <a:solidFill>
+                  <a:srgbClr val="666666"/>
+                </a:solidFill>
+                <a:latin typeface="Calibri"/>
+              </a:defRPr>
+            </a:pPr>
+            <a:r>
+              <a:t>    Canales: segregar mercados internos (p.ej., tokens de fidelizacion por region).</a:t>
+            </a:r>
+          </a:p>
+          <a:p>
+            <a:pPr lvl="1">
+              <a:spcAft>
+                <a:spcPts val="400"/>
+              </a:spcAft>
+              <a:defRPr sz="1700">
+                <a:solidFill>
+                  <a:srgbClr val="666666"/>
+                </a:solidFill>
+                <a:latin typeface="Calibri"/>
+              </a:defRPr>
+            </a:pPr>
+            <a:r>
+              <a:t>    Private Data Collections: importes y terminos comerciales visibles solo entre partes.</a:t>
+            </a:r>
+          </a:p>
+          <a:p>
+            <a:pPr lvl="1">
+              <a:spcAft>
+                <a:spcPts val="400"/>
+              </a:spcAft>
+              <a:defRPr sz="1700">
+                <a:solidFill>
+                  <a:srgbClr val="666666"/>
+                </a:solidFill>
+                <a:latin typeface="Calibri"/>
+              </a:defRPr>
+            </a:pPr>
+            <a:r>
+              <a:t>    Cumplimiento GDPR: datos personales off-chain, solo hashes on-chain.</a:t>
+            </a:r>
+          </a:p>
+          <a:p>
+            <a:pPr lvl="1">
+              <a:spcAft>
+                <a:spcPts val="400"/>
+              </a:spcAft>
+              <a:defRPr sz="1700">
+                <a:solidFill>
+                  <a:srgbClr val="666666"/>
+                </a:solidFill>
+                <a:latin typeface="Calibri"/>
+              </a:defRPr>
+            </a:pPr>
+            <a:r>
+              <a:t>    Confidencialidad competitiva: los competidores en la red no ven los datos sensibles.</a:t>
+            </a:r>
+          </a:p>
+          <a:p>
+            <a:pPr lvl="1">
+              <a:spcAft>
+                <a:spcPts val="400"/>
+              </a:spcAft>
+              <a:defRPr sz="1700">
+                <a:solidFill>
+                  <a:srgbClr val="666666"/>
+                </a:solidFill>
+                <a:latin typeface="Calibri"/>
+              </a:defRPr>
+            </a:pPr>
+            <a:r>
+              <a:t>    Respeto a secretos comerciales: tarifas, margenes, clientes finales no expuestos.</a:t>
             </a:r>
           </a:p>
         </p:txBody>
